--- a/Documents_Zavtra/KT1_Zavtra.pptx
+++ b/Documents_Zavtra/KT1_Zavtra.pptx
@@ -4116,7 +4116,7 @@
                 </a:solidFill>
                 <a:latin typeface="Arial"/>
               </a:rPr>
-              <a:t>Автоматические тесты: 31 из 31.</a:t>
+              <a:t>Код и документы опубликованы в GitHub.</a:t>
             </a:r>
           </a:p>
           <a:p>
@@ -4135,7 +4135,7 @@
                 </a:solidFill>
                 <a:latin typeface="Arial"/>
               </a:rPr>
-              <a:t>Проверки GitHub Actions успешны</a:t>
+              <a:t>Подготовлены демоданные и инструкция</a:t>
             </a:r>
           </a:p>
           <a:p>
@@ -4154,7 +4154,7 @@
                 </a:solidFill>
                 <a:latin typeface="Arial"/>
               </a:rPr>
-              <a:t>на Python 3.12 и 3.14.</a:t>
+              <a:t>запуска.</a:t>
             </a:r>
           </a:p>
         </p:txBody>
@@ -4167,8 +4167,8 @@
         </p:nvSpPr>
         <p:spPr>
           <a:xfrm>
-            <a:off x="5166360" y="4535424"/>
-            <a:ext cx="274320" cy="365760"/>
+            <a:off x="5532120" y="5897880"/>
+            <a:ext cx="6080760" cy="320040"/>
           </a:xfrm>
           <a:prstGeom prst="rect">
             <a:avLst/>
@@ -4190,128 +4190,6 @@
               </a:spcAft>
             </a:pPr>
             <a:r>
-              <a:rPr sz="2200">
-                <a:solidFill>
-                  <a:srgbClr val="595959"/>
-                </a:solidFill>
-                <a:latin typeface="Arial"/>
-              </a:rPr>
-              <a:t>•</a:t>
-            </a:r>
-          </a:p>
-        </p:txBody>
-      </p:sp>
-      <p:sp>
-        <p:nvSpPr>
-          <p:cNvPr id="25" name="TextBox 24"/>
-          <p:cNvSpPr txBox="1"/>
-          <p:nvPr/>
-        </p:nvSpPr>
-        <p:spPr>
-          <a:xfrm>
-            <a:off x="5532120" y="4535424"/>
-            <a:ext cx="6080760" cy="978408"/>
-          </a:xfrm>
-          <a:prstGeom prst="rect">
-            <a:avLst/>
-          </a:prstGeom>
-          <a:noFill/>
-        </p:spPr>
-        <p:txBody>
-          <a:bodyPr wrap="square" lIns="0" rIns="0" tIns="0" bIns="0">
-            <a:spAutoFit/>
-          </a:bodyPr>
-          <a:lstStyle/>
-          <a:p>
-            <a:pPr>
-              <a:lnSpc>
-                <a:spcPct val="112000"/>
-              </a:lnSpc>
-              <a:spcAft>
-                <a:spcPts val="0"/>
-              </a:spcAft>
-            </a:pPr>
-            <a:r>
-              <a:rPr sz="2000">
-                <a:solidFill>
-                  <a:srgbClr val="595959"/>
-                </a:solidFill>
-                <a:latin typeface="Arial"/>
-              </a:rPr>
-              <a:t>Код и документы опубликованы в GitHub.</a:t>
-            </a:r>
-          </a:p>
-          <a:p>
-            <a:pPr>
-              <a:lnSpc>
-                <a:spcPct val="112000"/>
-              </a:lnSpc>
-              <a:spcAft>
-                <a:spcPts val="0"/>
-              </a:spcAft>
-            </a:pPr>
-            <a:r>
-              <a:rPr sz="2000">
-                <a:solidFill>
-                  <a:srgbClr val="595959"/>
-                </a:solidFill>
-                <a:latin typeface="Arial"/>
-              </a:rPr>
-              <a:t>Подготовлены демоданные и инструкция</a:t>
-            </a:r>
-          </a:p>
-          <a:p>
-            <a:pPr>
-              <a:lnSpc>
-                <a:spcPct val="112000"/>
-              </a:lnSpc>
-              <a:spcAft>
-                <a:spcPts val="0"/>
-              </a:spcAft>
-            </a:pPr>
-            <a:r>
-              <a:rPr sz="2000">
-                <a:solidFill>
-                  <a:srgbClr val="595959"/>
-                </a:solidFill>
-                <a:latin typeface="Arial"/>
-              </a:rPr>
-              <a:t>запуска.</a:t>
-            </a:r>
-          </a:p>
-        </p:txBody>
-      </p:sp>
-      <p:sp>
-        <p:nvSpPr>
-          <p:cNvPr id="26" name="TextBox 25"/>
-          <p:cNvSpPr txBox="1"/>
-          <p:nvPr/>
-        </p:nvSpPr>
-        <p:spPr>
-          <a:xfrm>
-            <a:off x="5532120" y="5897880"/>
-            <a:ext cx="6080760" cy="320040"/>
-          </a:xfrm>
-          <a:prstGeom prst="rect">
-            <a:avLst/>
-          </a:prstGeom>
-          <a:noFill/>
-        </p:spPr>
-        <p:txBody>
-          <a:bodyPr wrap="square" lIns="0" rIns="0" tIns="0" bIns="0">
-            <a:spAutoFit/>
-          </a:bodyPr>
-          <a:lstStyle/>
-          <a:p>
-            <a:pPr>
-              <a:lnSpc>
-                <a:spcPct val="112000"/>
-              </a:lnSpc>
-              <a:spcAft>
-                <a:spcPts val="0"/>
-              </a:spcAft>
-            </a:pPr>
-            <a:r>
               <a:rPr sz="1400">
                 <a:solidFill>
                   <a:srgbClr val="595959"/>
@@ -4325,7 +4203,7 @@
       </p:sp>
       <p:sp>
         <p:nvSpPr>
-          <p:cNvPr id="27" name="TextBox 26"/>
+          <p:cNvPr id="25" name="TextBox 24"/>
           <p:cNvSpPr txBox="1"/>
           <p:nvPr/>
         </p:nvSpPr>
